--- a/docs/presentation/exports/Farovon_presentation.pptx
+++ b/docs/presentation/exports/Farovon_presentation.pptx
@@ -694,7 +694,7 @@
           <a:p>
             <a:r>
               <a:rPr lang="en-US" dirty="0"/>
-              <a:t>Пример: оклад бухгалтера 6 900 при рынке 7 250 даёт compa-ratio 0,95 — в норме. Цифры демонстрационные.</a:t>
+              <a:t>Пример: оклад Фаровон 6 600 при медиане рынка 7 150 — на 8% ниже рынка. Цифры демонстрационные.</a:t>
             </a:r>
             <a:endParaRPr lang="en-US" dirty="0"/>
           </a:p>
@@ -1926,7 +1926,7 @@
           <a:p>
             <a:r>
               <a:rPr lang="en-US" dirty="0"/>
-              <a:t>Синий блок — диапазон от 25-го до 75-го процентиля, тёмная риска — медиана, тонкая линия — минимум и максимум рынка.</a:t>
+              <a:t>Реальный экран дашборда: медиана рынка, самые массовые должности, топ компаний-источников и подсказка «Гэп к рынку», когда оклад Фаровон ещё не задан.</a:t>
             </a:r>
             <a:endParaRPr lang="en-US" dirty="0"/>
           </a:p>
@@ -3311,7 +3311,7 @@
                 <a:ea typeface="Calibri" pitchFamily="34" charset="-122"/>
                 <a:cs typeface="Calibri" pitchFamily="34" charset="-120"/>
               </a:rPr>
-              <a:t>Демонстрационные данные</a:t>
+              <a:t>Реальный интерфейс · тестовые данные</a:t>
             </a:r>
             <a:endParaRPr lang="en-US" sz="1100" dirty="0"/>
           </a:p>
@@ -8432,7 +8432,7 @@
                 <a:ea typeface="Calibri" pitchFamily="34" charset="-122"/>
                 <a:cs typeface="Calibri" pitchFamily="34" charset="-120"/>
               </a:rPr>
-              <a:t>Демонстрационные данные</a:t>
+              <a:t>Реальный интерфейс · тестовые данные</a:t>
             </a:r>
             <a:endParaRPr lang="en-US" sz="1100" dirty="0"/>
           </a:p>
@@ -8683,7 +8683,7 @@
                 <a:ea typeface="Calibri" pitchFamily="34" charset="-122"/>
                 <a:cs typeface="Calibri" pitchFamily="34" charset="-120"/>
               </a:rPr>
-              <a:t>Демонстрационные данные</a:t>
+              <a:t>Реальный интерфейс · тестовые данные</a:t>
             </a:r>
             <a:endParaRPr lang="en-US" sz="1100" dirty="0"/>
           </a:p>
@@ -8934,7 +8934,7 @@
                 <a:ea typeface="Calibri" pitchFamily="34" charset="-122"/>
                 <a:cs typeface="Calibri" pitchFamily="34" charset="-120"/>
               </a:rPr>
-              <a:t>Демонстрационные данные</a:t>
+              <a:t>Реальный интерфейс · тестовые данные</a:t>
             </a:r>
             <a:endParaRPr lang="en-US" sz="1100" dirty="0"/>
           </a:p>
@@ -9100,7 +9100,7 @@
                 <a:ea typeface="Calibri" pitchFamily="34" charset="-122"/>
                 <a:cs typeface="Calibri" pitchFamily="34" charset="-120"/>
               </a:rPr>
-              <a:t>Демонстрационные данные</a:t>
+              <a:t>Реальный интерфейс · тестовые данные</a:t>
             </a:r>
             <a:endParaRPr lang="en-US" sz="1100" dirty="0"/>
           </a:p>
@@ -9195,7 +9195,7 @@
                 <a:ea typeface="Calibri" pitchFamily="34" charset="-122"/>
                 <a:cs typeface="Calibri" pitchFamily="34" charset="-120"/>
               </a:rPr>
-              <a:t>Демонстрационные данные</a:t>
+              <a:t>Реальный интерфейс · тестовые данные</a:t>
             </a:r>
             <a:endParaRPr lang="en-US" sz="1100" dirty="0"/>
           </a:p>
@@ -9234,7 +9234,7 @@
                 <a:ea typeface="Calibri" pitchFamily="34" charset="-122"/>
                 <a:cs typeface="Calibri" pitchFamily="34" charset="-120"/>
               </a:rPr>
-              <a:t>Слева: ход сбора, дашборд, бенчмаркинг. Справа: оценка должностей, риски, меню «Ещё» с администрированием.</a:t>
+              <a:t>Слева: ход сбора по подразделению. Справа: дашборд с медианой рынка и вилками.</a:t>
             </a:r>
             <a:endParaRPr lang="en-US" sz="1500" dirty="0"/>
           </a:p>
@@ -9485,7 +9485,7 @@
                 <a:ea typeface="Calibri" pitchFamily="34" charset="-122"/>
                 <a:cs typeface="Calibri" pitchFamily="34" charset="-120"/>
               </a:rPr>
-              <a:t>Демонстрационные данные</a:t>
+              <a:t>Реальный интерфейс · тестовые данные</a:t>
             </a:r>
             <a:endParaRPr lang="en-US" sz="1100" dirty="0"/>
           </a:p>
@@ -9757,7 +9757,7 @@
                 <a:ea typeface="Calibri" pitchFamily="34" charset="-122"/>
                 <a:cs typeface="Calibri" pitchFamily="34" charset="-120"/>
               </a:rPr>
-              <a:t>Демонстрационные данные</a:t>
+              <a:t>Реальный интерфейс · тестовые данные</a:t>
             </a:r>
             <a:endParaRPr lang="en-US" sz="1100" dirty="0"/>
           </a:p>
